--- a/reports/Project_FORESIGHT.pptx
+++ b/reports/Project_FORESIGHT.pptx
@@ -5086,7 +5086,7 @@
         <p:spPr>
           <a:xfrm>
             <a:off x="301752" y="3017520"/>
-            <a:ext cx="1133856" cy="548640"/>
+            <a:ext cx="1133856" cy="685800"/>
           </a:xfrm>
           <a:prstGeom prst="rect">
             <a:avLst/>
@@ -5213,7 +5213,7 @@
         <p:spPr>
           <a:xfrm>
             <a:off x="1536192" y="3017520"/>
-            <a:ext cx="1133856" cy="548640"/>
+            <a:ext cx="1133856" cy="685800"/>
           </a:xfrm>
           <a:prstGeom prst="rect">
             <a:avLst/>
@@ -5340,7 +5340,7 @@
         <p:spPr>
           <a:xfrm>
             <a:off x="2770632" y="3017520"/>
-            <a:ext cx="1133856" cy="548640"/>
+            <a:ext cx="1133856" cy="685800"/>
           </a:xfrm>
           <a:prstGeom prst="rect">
             <a:avLst/>
@@ -5467,7 +5467,7 @@
         <p:spPr>
           <a:xfrm>
             <a:off x="4005072" y="3017520"/>
-            <a:ext cx="1133856" cy="548640"/>
+            <a:ext cx="1133856" cy="685800"/>
           </a:xfrm>
           <a:prstGeom prst="rect">
             <a:avLst/>
@@ -5594,7 +5594,7 @@
         <p:spPr>
           <a:xfrm>
             <a:off x="5239512" y="3017520"/>
-            <a:ext cx="1133856" cy="548640"/>
+            <a:ext cx="1133856" cy="685800"/>
           </a:xfrm>
           <a:prstGeom prst="rect">
             <a:avLst/>
@@ -5721,7 +5721,7 @@
         <p:spPr>
           <a:xfrm>
             <a:off x="6473952" y="3017520"/>
-            <a:ext cx="1133856" cy="548640"/>
+            <a:ext cx="1133856" cy="685800"/>
           </a:xfrm>
           <a:prstGeom prst="rect">
             <a:avLst/>
@@ -5824,7 +5824,7 @@
         <p:spPr>
           <a:xfrm>
             <a:off x="7708392" y="3017520"/>
-            <a:ext cx="1133856" cy="548640"/>
+            <a:ext cx="1133856" cy="685800"/>
           </a:xfrm>
           <a:prstGeom prst="rect">
             <a:avLst/>
@@ -5848,7 +5848,7 @@
                 <a:ea typeface="Calibri" pitchFamily="34" charset="-122"/>
                 <a:cs typeface="Calibri" pitchFamily="34" charset="-120"/>
               </a:rPr>
-              <a:t>Public Scoring API</a:t>
+              <a:t>Forecasting, Risk Scoring &amp; Power BI Dashboard</a:t>
             </a:r>
             <a:endParaRPr lang="en-US" sz="1100" dirty="0"/>
           </a:p>
@@ -10289,7 +10289,7 @@
                 <a:ea typeface="Calibri" pitchFamily="34" charset="-122"/>
                 <a:cs typeface="Calibri" pitchFamily="34" charset="-120"/>
               </a:rPr>
-              <a:t>Production-Oriented Delivery with Transparent Limitations</a:t>
+              <a:t>Analytics Delivery with Transparent Limitations</a:t>
             </a:r>
             <a:endParaRPr lang="en-US" sz="2400" dirty="0"/>
           </a:p>
@@ -10549,46 +10549,6 @@
                 <a:cs typeface="Calibri" pitchFamily="34" charset="-120"/>
               </a:rPr>
               <a:t>✓  Power BI planning dashboard</a:t>
-            </a:r>
-            <a:endParaRPr lang="en-US" sz="1100" dirty="0"/>
-          </a:p>
-          <a:p>
-            <a:pPr indent="0" marL="0">
-              <a:spcAft>
-                <a:spcPts val="400"/>
-              </a:spcAft>
-              <a:buNone/>
-            </a:pPr>
-            <a:r>
-              <a:rPr lang="en-US" sz="1100" dirty="0">
-                <a:solidFill>
-                  <a:srgbClr val="0B1F3A"/>
-                </a:solidFill>
-                <a:latin typeface="Calibri" pitchFamily="34" charset="0"/>
-                <a:ea typeface="Calibri" pitchFamily="34" charset="-122"/>
-                <a:cs typeface="Calibri" pitchFamily="34" charset="-120"/>
-              </a:rPr>
-              <a:t>✓  Public Flask scoring API</a:t>
-            </a:r>
-            <a:endParaRPr lang="en-US" sz="1100" dirty="0"/>
-          </a:p>
-          <a:p>
-            <a:pPr indent="0" marL="0">
-              <a:spcAft>
-                <a:spcPts val="400"/>
-              </a:spcAft>
-              <a:buNone/>
-            </a:pPr>
-            <a:r>
-              <a:rPr lang="en-US" sz="1100" dirty="0">
-                <a:solidFill>
-                  <a:srgbClr val="0B1F3A"/>
-                </a:solidFill>
-                <a:latin typeface="Calibri" pitchFamily="34" charset="0"/>
-                <a:ea typeface="Calibri" pitchFamily="34" charset="-122"/>
-                <a:cs typeface="Calibri" pitchFamily="34" charset="-120"/>
-              </a:rPr>
-              <a:t>✓  Batch prediction endpoint</a:t>
             </a:r>
             <a:endParaRPr lang="en-US" sz="1100" dirty="0"/>
           </a:p>
@@ -10839,79 +10799,6 @@
         </p:nvSpPr>
         <p:spPr>
           <a:xfrm>
-            <a:off x="457200" y="3657600"/>
-            <a:ext cx="8229600" cy="457200"/>
-          </a:xfrm>
-          <a:prstGeom prst="rect">
-            <a:avLst/>
-          </a:prstGeom>
-          <a:solidFill>
-            <a:srgbClr val="E8F1F5"/>
-          </a:solidFill>
-          <a:ln/>
-        </p:spPr>
-      </p:sp>
-      <p:sp>
-        <p:nvSpPr>
-          <p:cNvPr id="15" name="Text 13"/>
-          <p:cNvSpPr txBox="1"/>
-          <p:nvPr/>
-        </p:nvSpPr>
-        <p:spPr>
-          <a:xfrm>
-            <a:off x="640080" y="3657600"/>
-            <a:ext cx="7863840" cy="457200"/>
-          </a:xfrm>
-          <a:prstGeom prst="rect">
-            <a:avLst/>
-          </a:prstGeom>
-          <a:noFill/>
-          <a:ln/>
-        </p:spPr>
-        <p:txBody>
-          <a:bodyPr wrap="square" lIns="0" tIns="0" rIns="0" bIns="0" rtlCol="0" anchor="ctr"/>
-          <a:lstStyle/>
-          <a:p>
-            <a:pPr indent="0" marL="0">
-              <a:buNone/>
-            </a:pPr>
-            <a:r>
-              <a:rPr lang="en-US" sz="900" b="1" dirty="0">
-                <a:solidFill>
-                  <a:srgbClr val="1F6F8B"/>
-                </a:solidFill>
-                <a:latin typeface="Calibri" pitchFamily="34" charset="0"/>
-                <a:ea typeface="Calibri" pitchFamily="34" charset="-122"/>
-                <a:cs typeface="Calibri" pitchFamily="34" charset="-120"/>
-              </a:rPr>
-              <a:t>PUBLIC SCORING API   </a:t>
-            </a:r>
-            <a:pPr indent="0" marL="0">
-              <a:buNone/>
-            </a:pPr>
-            <a:r>
-              <a:rPr lang="en-US" sz="1300" b="1" dirty="0">
-                <a:solidFill>
-                  <a:srgbClr val="0B1F3A"/>
-                </a:solidFill>
-                <a:latin typeface="Calibri" pitchFamily="34" charset="0"/>
-                <a:ea typeface="Calibri" pitchFamily="34" charset="-122"/>
-                <a:cs typeface="Calibri" pitchFamily="34" charset="-120"/>
-              </a:rPr>
-              <a:t>https://foresight-scoring-api-v2.onrender.com</a:t>
-            </a:r>
-            <a:endParaRPr lang="en-US" sz="1200" dirty="0"/>
-          </a:p>
-        </p:txBody>
-      </p:sp>
-      <p:sp>
-        <p:nvSpPr>
-          <p:cNvPr id="16" name="Shape 14"/>
-          <p:cNvSpPr/>
-          <p:nvPr/>
-        </p:nvSpPr>
-        <p:spPr>
-          <a:xfrm>
             <a:off x="457200" y="4224528"/>
             <a:ext cx="8229600" cy="457200"/>
           </a:xfrm>
@@ -10926,7 +10813,7 @@
       </p:sp>
       <p:sp>
         <p:nvSpPr>
-          <p:cNvPr id="17" name="Text 15"/>
+          <p:cNvPr id="15" name="Text 13"/>
           <p:cNvSpPr txBox="1"/>
           <p:nvPr/>
         </p:nvSpPr>
